--- a/docs/答辩材料/答辩PPT.pptx
+++ b/docs/答辩材料/答辩PPT.pptx
@@ -16867,7 +16867,7 @@
                 </a:solidFill>
                 <a:latin typeface="Microsoft YaHei"/>
               </a:rPr>
-              <a:t>B31 的两种修法（二选一，要写清口径）：</a:t>
+              <a:t>B31 已按修法 ① 落地（同事务级联软删档案与业务数据）；修法 ②（统计侧一律 JOIN sys_user 过滤 deleted = 0）作为备选未采用 —— 改统计侧会牵动所有看板 SQL，而修法 ① 在写入侧一次收口。</a:t>
             </a:r>
             <a:r>
               <a:rPr sz="1050" b="0">
@@ -16876,7 +16876,7 @@
                 </a:solidFill>
                 <a:latin typeface="Microsoft YaHei"/>
               </a:rPr>
-              <a:t>① 删用户时同事务软删档案并处理报名 / 时长；② 统计侧一律 JOIN sys_user 过滤 deleted = 0。</a:t>
+              <a:t/>
             </a:r>
           </a:p>
         </p:txBody>

--- a/docs/答辩材料/答辩PPT.pptx
+++ b/docs/答辩材料/答辩PPT.pptx
@@ -17870,7 +17870,7 @@
                 </a:solidFill>
                 <a:latin typeface="Microsoft YaHei"/>
               </a:rPr>
-              <a:t>· 做了什么：一套覆盖三个角色、七步闭环的志愿服务时长认证与公益画像系统 —— 16 张表、11 个 Maven 模块、29 个前端页面、72 个接口。</a:t>
+              <a:t>· 做了什么：一套覆盖三个角色、七步闭环的志愿服务时长认证与公益画像系统 —— 16 张表、11 个 Maven 模块、29 个前端页面、73 个接口。</a:t>
             </a:r>
           </a:p>
           <a:p>
@@ -17936,7 +17936,7 @@
                 </a:solidFill>
                 <a:latin typeface="Microsoft YaHei"/>
               </a:rPr>
-              <a:t>· 还差什么：后端零单元测试、B31 删除用户不级联、组织资质与头像上传未接、6 档阈值未集中配置 —— 全部如实记录在上一页。</a:t>
+              <a:t>· 还差什么：后端零单元测试、B31 未追溯存量脏数据、组织资质与头像上传未接、6 档阈值未集中配置 —— 全部如实记录在上一页。</a:t>
             </a:r>
           </a:p>
           <a:p>

--- a/docs/答辩材料/答辩PPT.pptx
+++ b/docs/答辩材料/答辩PPT.pptx
@@ -560,12 +560,12 @@
           </a:p>
           <a:p>
             <a:r>
-              <a:t>• 小组自报姓名确实存在（docs/第2组_高校志愿时长认证与公益画像系统_赖声煜_邓自洁_杨柏沣.docx 表头：</a:t>
-            </a:r>
-          </a:p>
-          <a:p>
-            <a:r>
-              <a:t>  实验人 赖声煜/邓自洁/杨柏沣，学号 2024521109/2024521542/2024541250，班级 软件技术2404），</a:t>
+              <a:t>• 小组自报姓名确实存在（docs/第2组_高校志愿时长认证与公益画像系统_赖声煜_邓自洁_赵洪.docx 表头：</a:t>
+            </a:r>
+          </a:p>
+          <a:p>
+            <a:r>
+              <a:t>  实验人 赖声煜/邓自洁/赵洪，学号 2024521109/2024521542/2024521402，班级 软件技术2404），</a:t>
             </a:r>
           </a:p>
           <a:p>
@@ -2432,7 +2432,7 @@
           </a:p>
           <a:p>
             <a:r>
-              <a:t>• 姓名与学号：docs/第2组_高校志愿时长认证与公益画像系统_赖声煜_邓自洁_杨柏沣.docx 第 0 张表第 1 行</a:t>
+              <a:t>• 姓名与学号：docs/第2组_高校志愿时长认证与公益画像系统_赖声煜_邓自洁_赵洪.docx 第 0 张表第 1 行</a:t>
             </a:r>
           </a:p>
           <a:p>
@@ -17760,7 +17760,7 @@
                 </a:solidFill>
                 <a:latin typeface="Microsoft YaHei"/>
               </a:rPr>
-              <a:t>成员 A / B / C 为开发计划原文占位（docs/…开发计划与分工.md:935-941），小组自报姓名为 赖声煜 / 邓自洁 / 杨柏沣，学号 2024521109 / 2024521542 / 2024541250，但姓名与 A/B/C 的对应关系未在任何文档中给出 —— 待本人确认后替换。指导教师一栏在现有资料中无出处，须由本人提供。</a:t>
+              <a:t>成员 A / B / C 为开发计划原文占位（docs/…开发计划与分工.md:935-941），小组自报姓名为 赖声煜 / 邓自洁 / 赵洪，学号 2024521109 / 2024521542 / 2024521402，但姓名与 A/B/C 的对应关系未在任何文档中给出 —— 待本人确认后替换。指导教师一栏在现有资料中无出处，须由本人提供。</a:t>
             </a:r>
           </a:p>
         </p:txBody>
@@ -18006,7 +18006,7 @@
                 </a:solidFill>
                 <a:latin typeface="Microsoft YaHei"/>
               </a:rPr>
-              <a:t>出处：docs/…开发计划与分工.md:933-1081,1358-1362｜docs/第2组_…赖声煜_邓自洁_杨柏沣.docx 表头</a:t>
+              <a:t>出处：docs/…开发计划与分工.md:933-1081,1358-1362｜docs/第2组_…赖声煜_邓自洁_赵洪.docx 表头</a:t>
             </a:r>
           </a:p>
         </p:txBody>
